--- a/dist/초5/영어/말하기와쓰기/초5_영어_말하기와쓰기_01_하루일과말하기_학생용.pptx
+++ b/dist/초5/영어/말하기와쓰기/초5_영어_말하기와쓰기_01_하루일과말하기_학생용.pptx
@@ -120,13 +120,13 @@
   <p:extLst>
     <p:ext uri="{521415D9-36F7-43E2-AB2F-B90AF26B5E84}">
       <p14:sectionLst xmlns:p14="http://schemas.microsoft.com/office/powerpoint/2010/main">
-        <p14:section name="도입" id="{7cd93a9d-07f2-6ce1-b6ab-9e06f9cfab0f}">
+        <p14:section name="도입" id="{441f8a27-2e31-3ce2-ec89-50dd04379b33}">
           <p14:sldIdLst>
             <p14:sldId id="256"/>
             <p14:sldId id="257"/>
           </p14:sldIdLst>
         </p14:section>
-        <p14:section name="개념" id="{6b237cf4-7cb2-6a2d-4a99-72853e337268}">
+        <p14:section name="개념" id="{3ae69186-3bd5-52a2-1d83-61717e0ff473}">
           <p14:sldIdLst>
             <p14:sldId id="258"/>
             <p14:sldId id="259"/>
@@ -135,31 +135,31 @@
             <p14:sldId id="264"/>
           </p14:sldIdLst>
         </p14:section>
-        <p14:section name="연습" id="{69b1bc8e-10e4-3f11-440d-40e246174fe0}">
+        <p14:section name="연습" id="{0c5d8ec2-dfb3-2d16-31f3-bd73ce8553fe}">
           <p14:sldIdLst>
             <p14:sldId id="262"/>
             <p14:sldId id="263"/>
             <p14:sldId id="265"/>
           </p14:sldIdLst>
         </p14:section>
-        <p14:section name="개념" id="{bfd16381-bd5f-54ea-8808-00f477b30860}">
+        <p14:section name="개념" id="{98732920-40a7-039d-aa1e-30a7fe4dd84f}">
           <p14:sldIdLst/>
         </p14:section>
-        <p14:section name="연습" id="{0bf5d21b-34e3-f2c5-2ab2-9ca7aaac9e23}">
+        <p14:section name="연습" id="{9484e199-32d1-c3ab-cc70-85aa041c74d8}">
           <p14:sldIdLst/>
         </p14:section>
-        <p14:section name="확인" id="{47dea3ca-3297-eb7c-c5ad-872fcd79a9a9}">
+        <p14:section name="확인" id="{a373cad8-ac24-6984-81d1-f5d88ab3ead4}">
           <p14:sldIdLst>
             <p14:sldId id="266"/>
             <p14:sldId id="267"/>
           </p14:sldIdLst>
         </p14:section>
-        <p14:section name="정리" id="{78c2b62b-3059-cb1d-19e6-b3f0aa3471f7}">
+        <p14:section name="정리" id="{afc86c39-2130-7e3d-7cdb-fb3a7213a3e5}">
           <p14:sldIdLst>
             <p14:sldId id="268"/>
           </p14:sldIdLst>
         </p14:section>
-        <p14:section name="보충" id="{a77eacb5-e4d9-ee0a-722a-33d796ff4258}">
+        <p14:section name="보충" id="{8cae9619-ced5-c0da-6a8e-0da48dd66dc6}">
           <p14:sldIdLst>
             <p14:sldId id="269"/>
           </p14:sldIdLst>

--- a/dist/초5/영어/말하기와쓰기/초5_영어_말하기와쓰기_01_하루일과말하기_학생용.pptx
+++ b/dist/초5/영어/말하기와쓰기/초5_영어_말하기와쓰기_01_하루일과말하기_학생용.pptx
@@ -120,13 +120,13 @@
   <p:extLst>
     <p:ext uri="{521415D9-36F7-43E2-AB2F-B90AF26B5E84}">
       <p14:sectionLst xmlns:p14="http://schemas.microsoft.com/office/powerpoint/2010/main">
-        <p14:section name="도입" id="{441f8a27-2e31-3ce2-ec89-50dd04379b33}">
+        <p14:section name="도입" id="{e73ab36c-9d44-b44e-1996-e6b6aeadcd3e}">
           <p14:sldIdLst>
             <p14:sldId id="256"/>
             <p14:sldId id="257"/>
           </p14:sldIdLst>
         </p14:section>
-        <p14:section name="개념" id="{3ae69186-3bd5-52a2-1d83-61717e0ff473}">
+        <p14:section name="개념" id="{c437eefe-755d-d1ea-fb20-e7fa53906f42}">
           <p14:sldIdLst>
             <p14:sldId id="258"/>
             <p14:sldId id="259"/>
@@ -135,31 +135,31 @@
             <p14:sldId id="264"/>
           </p14:sldIdLst>
         </p14:section>
-        <p14:section name="연습" id="{0c5d8ec2-dfb3-2d16-31f3-bd73ce8553fe}">
+        <p14:section name="연습" id="{939258d4-8876-e1d4-8bfb-7a17c4c288e0}">
           <p14:sldIdLst>
             <p14:sldId id="262"/>
             <p14:sldId id="263"/>
             <p14:sldId id="265"/>
           </p14:sldIdLst>
         </p14:section>
-        <p14:section name="개념" id="{98732920-40a7-039d-aa1e-30a7fe4dd84f}">
+        <p14:section name="개념" id="{f294aa3b-4038-56b2-6fe1-ddf1fcb88099}">
           <p14:sldIdLst/>
         </p14:section>
-        <p14:section name="연습" id="{9484e199-32d1-c3ab-cc70-85aa041c74d8}">
+        <p14:section name="연습" id="{9e60fe47-08cc-0911-5727-40ab9706e19a}">
           <p14:sldIdLst/>
         </p14:section>
-        <p14:section name="확인" id="{a373cad8-ac24-6984-81d1-f5d88ab3ead4}">
+        <p14:section name="확인" id="{c0c375df-481a-4571-474a-52c8f9a33094}">
           <p14:sldIdLst>
             <p14:sldId id="266"/>
             <p14:sldId id="267"/>
           </p14:sldIdLst>
         </p14:section>
-        <p14:section name="정리" id="{afc86c39-2130-7e3d-7cdb-fb3a7213a3e5}">
+        <p14:section name="정리" id="{01fab410-a892-21e7-df20-aa2ceb9f20e0}">
           <p14:sldIdLst>
             <p14:sldId id="268"/>
           </p14:sldIdLst>
         </p14:section>
-        <p14:section name="보충" id="{8cae9619-ced5-c0da-6a8e-0da48dd66dc6}">
+        <p14:section name="보충" id="{f0a6e979-1324-ce0c-a58d-2956c52ea00e}">
           <p14:sldIdLst>
             <p14:sldId id="269"/>
           </p14:sldIdLst>
